--- a/C#Files/VirtualMethodsAndPolymorphism/OOP Principles Quiz without answers.pptx
+++ b/C#Files/VirtualMethodsAndPolymorphism/OOP Principles Quiz without answers.pptx
@@ -142,11 +142,66 @@
 <pc:chgInfo xmlns:a="http://schemas.openxmlformats.org/drawingml/2006/main" xmlns:r="http://schemas.openxmlformats.org/officeDocument/2006/relationships" xmlns:ac="http://schemas.microsoft.com/office/drawing/2013/main/command" xmlns:pc="http://schemas.microsoft.com/office/powerpoint/2013/main/command">
   <pc:docChgLst>
     <pc:chgData name="Daniela Trapani" userId="30b41bef89cfceee" providerId="LiveId" clId="{ADEB5723-9D39-45AE-898F-3FDA33EC1B39}"/>
-    <pc:docChg chg="delSld modSld">
-      <pc:chgData name="Daniela Trapani" userId="30b41bef89cfceee" providerId="LiveId" clId="{ADEB5723-9D39-45AE-898F-3FDA33EC1B39}" dt="2026-06-24T11:36:07.427" v="35" actId="20577"/>
+    <pc:docChg chg="undo custSel delSld modSld">
+      <pc:chgData name="Daniela Trapani" userId="30b41bef89cfceee" providerId="LiveId" clId="{ADEB5723-9D39-45AE-898F-3FDA33EC1B39}" dt="2026-06-24T13:50:19.513" v="137" actId="14100"/>
       <pc:docMkLst>
         <pc:docMk/>
       </pc:docMkLst>
+      <pc:sldChg chg="delSp modSp mod">
+        <pc:chgData name="Daniela Trapani" userId="30b41bef89cfceee" providerId="LiveId" clId="{ADEB5723-9D39-45AE-898F-3FDA33EC1B39}" dt="2026-06-24T13:50:19.513" v="137" actId="14100"/>
+        <pc:sldMkLst>
+          <pc:docMk/>
+          <pc:sldMk cId="0" sldId="256"/>
+        </pc:sldMkLst>
+        <pc:spChg chg="mod">
+          <ac:chgData name="Daniela Trapani" userId="30b41bef89cfceee" providerId="LiveId" clId="{ADEB5723-9D39-45AE-898F-3FDA33EC1B39}" dt="2026-06-24T13:50:14.823" v="136" actId="14100"/>
+          <ac:spMkLst>
+            <pc:docMk/>
+            <pc:sldMk cId="0" sldId="256"/>
+            <ac:spMk id="7" creationId="{00000000-0000-0000-0000-000000000000}"/>
+          </ac:spMkLst>
+        </pc:spChg>
+        <pc:spChg chg="mod">
+          <ac:chgData name="Daniela Trapani" userId="30b41bef89cfceee" providerId="LiveId" clId="{ADEB5723-9D39-45AE-898F-3FDA33EC1B39}" dt="2026-06-24T13:50:19.513" v="137" actId="14100"/>
+          <ac:spMkLst>
+            <pc:docMk/>
+            <pc:sldMk cId="0" sldId="256"/>
+            <ac:spMk id="8" creationId="{00000000-0000-0000-0000-000000000000}"/>
+          </ac:spMkLst>
+        </pc:spChg>
+        <pc:spChg chg="mod">
+          <ac:chgData name="Daniela Trapani" userId="30b41bef89cfceee" providerId="LiveId" clId="{ADEB5723-9D39-45AE-898F-3FDA33EC1B39}" dt="2026-06-24T13:50:05.636" v="134" actId="14100"/>
+          <ac:spMkLst>
+            <pc:docMk/>
+            <pc:sldMk cId="0" sldId="256"/>
+            <ac:spMk id="9" creationId="{00000000-0000-0000-0000-000000000000}"/>
+          </ac:spMkLst>
+        </pc:spChg>
+        <pc:spChg chg="mod">
+          <ac:chgData name="Daniela Trapani" userId="30b41bef89cfceee" providerId="LiveId" clId="{ADEB5723-9D39-45AE-898F-3FDA33EC1B39}" dt="2026-06-24T13:50:09.245" v="135" actId="14100"/>
+          <ac:spMkLst>
+            <pc:docMk/>
+            <pc:sldMk cId="0" sldId="256"/>
+            <ac:spMk id="10" creationId="{00000000-0000-0000-0000-000000000000}"/>
+          </ac:spMkLst>
+        </pc:spChg>
+        <pc:spChg chg="del">
+          <ac:chgData name="Daniela Trapani" userId="30b41bef89cfceee" providerId="LiveId" clId="{ADEB5723-9D39-45AE-898F-3FDA33EC1B39}" dt="2026-06-24T13:48:50.479" v="36" actId="478"/>
+          <ac:spMkLst>
+            <pc:docMk/>
+            <pc:sldMk cId="0" sldId="256"/>
+            <ac:spMk id="11" creationId="{00000000-0000-0000-0000-000000000000}"/>
+          </ac:spMkLst>
+        </pc:spChg>
+        <pc:spChg chg="del">
+          <ac:chgData name="Daniela Trapani" userId="30b41bef89cfceee" providerId="LiveId" clId="{ADEB5723-9D39-45AE-898F-3FDA33EC1B39}" dt="2026-06-24T13:48:55.539" v="37" actId="478"/>
+          <ac:spMkLst>
+            <pc:docMk/>
+            <pc:sldMk cId="0" sldId="256"/>
+            <ac:spMk id="12" creationId="{00000000-0000-0000-0000-000000000000}"/>
+          </ac:spMkLst>
+        </pc:spChg>
+      </pc:sldChg>
       <pc:sldChg chg="del">
         <pc:chgData name="Daniela Trapani" userId="30b41bef89cfceee" providerId="LiveId" clId="{ADEB5723-9D39-45AE-898F-3FDA33EC1B39}" dt="2026-06-24T09:56:04.433" v="0" actId="47"/>
         <pc:sldMkLst>
@@ -3589,7 +3644,7 @@
         <p:spPr>
           <a:xfrm>
             <a:off x="640080" y="3429000"/>
-            <a:ext cx="1828800" cy="457200"/>
+            <a:ext cx="2133265" cy="457200"/>
           </a:xfrm>
           <a:prstGeom prst="roundRect">
             <a:avLst>
@@ -3622,8 +3677,8 @@
         </p:nvSpPr>
         <p:spPr>
           <a:xfrm>
-            <a:off x="640080" y="3429000"/>
-            <a:ext cx="1828800" cy="457200"/>
+            <a:off x="708409" y="3429000"/>
+            <a:ext cx="2014694" cy="457200"/>
           </a:xfrm>
           <a:prstGeom prst="rect">
             <a:avLst/>
@@ -3661,8 +3716,8 @@
         </p:nvSpPr>
         <p:spPr>
           <a:xfrm>
-            <a:off x="2606040" y="3429000"/>
-            <a:ext cx="1828800" cy="457200"/>
+            <a:off x="3059723" y="3429000"/>
+            <a:ext cx="2080009" cy="457200"/>
           </a:xfrm>
           <a:prstGeom prst="roundRect">
             <a:avLst>
@@ -3695,8 +3750,8 @@
         </p:nvSpPr>
         <p:spPr>
           <a:xfrm>
-            <a:off x="2606040" y="3429000"/>
-            <a:ext cx="1828800" cy="457200"/>
+            <a:off x="3175279" y="3429000"/>
+            <a:ext cx="1868995" cy="457200"/>
           </a:xfrm>
           <a:prstGeom prst="rect">
             <a:avLst/>
@@ -3721,79 +3776,6 @@
                 <a:cs typeface="Segoe UI" pitchFamily="34" charset="-120"/>
               </a:rPr>
               <a:t>Mixed format</a:t>
-            </a:r>
-            <a:endParaRPr lang="en-US" sz="1200" dirty="0"/>
-          </a:p>
-        </p:txBody>
-      </p:sp>
-      <p:sp>
-        <p:nvSpPr>
-          <p:cNvPr id="11" name="Shape 9"/>
-          <p:cNvSpPr/>
-          <p:nvPr/>
-        </p:nvSpPr>
-        <p:spPr>
-          <a:xfrm>
-            <a:off x="4572000" y="3429000"/>
-            <a:ext cx="1828800" cy="457200"/>
-          </a:xfrm>
-          <a:prstGeom prst="roundRect">
-            <a:avLst>
-              <a:gd name="adj" fmla="val 16000"/>
-            </a:avLst>
-          </a:prstGeom>
-          <a:solidFill>
-            <a:srgbClr val="1D4ED8"/>
-          </a:solidFill>
-          <a:ln w="12700">
-            <a:solidFill>
-              <a:srgbClr val="3B82F6"/>
-            </a:solidFill>
-            <a:prstDash val="solid"/>
-          </a:ln>
-        </p:spPr>
-        <p:txBody>
-          <a:bodyPr/>
-          <a:lstStyle/>
-          <a:p>
-            <a:endParaRPr lang="en-US"/>
-          </a:p>
-        </p:txBody>
-      </p:sp>
-      <p:sp>
-        <p:nvSpPr>
-          <p:cNvPr id="12" name="Text 10"/>
-          <p:cNvSpPr/>
-          <p:nvPr/>
-        </p:nvSpPr>
-        <p:spPr>
-          <a:xfrm>
-            <a:off x="4572000" y="3429000"/>
-            <a:ext cx="1828800" cy="457200"/>
-          </a:xfrm>
-          <a:prstGeom prst="rect">
-            <a:avLst/>
-          </a:prstGeom>
-          <a:noFill/>
-          <a:ln/>
-        </p:spPr>
-        <p:txBody>
-          <a:bodyPr wrap="square" lIns="0" tIns="0" rIns="0" bIns="0" rtlCol="0" anchor="ctr"/>
-          <a:lstStyle/>
-          <a:p>
-            <a:pPr marL="0" indent="0" algn="ctr">
-              <a:buNone/>
-            </a:pPr>
-            <a:r>
-              <a:rPr lang="en-US" sz="1200" b="1" dirty="0">
-                <a:solidFill>
-                  <a:srgbClr val="FFFFFF"/>
-                </a:solidFill>
-                <a:latin typeface="Segoe UI" pitchFamily="34" charset="0"/>
-                <a:ea typeface="Segoe UI" pitchFamily="34" charset="-122"/>
-                <a:cs typeface="Segoe UI" pitchFamily="34" charset="-120"/>
-              </a:rPr>
-              <a:t>Answers included</a:t>
             </a:r>
             <a:endParaRPr lang="en-US" sz="1200" dirty="0"/>
           </a:p>
